--- a/kit/documents/slides/fusionspace-slides.pptx
+++ b/kit/documents/slides/fusionspace-slides.pptx
@@ -2039,7 +2039,7 @@
           <a:p>
             <a:r>
               <a:rPr lang="en-US" dirty="0"/>
-              <a:t>Chart colours: Ion and M orange on light. Edit the data in PowerPoint (right-click → Edit Data).</a:t>
+              <a:t>Chart colors: Ion and M orange on light. Edit the data in PowerPoint (right-click → Edit Data).</a:t>
             </a:r>
             <a:endParaRPr lang="en-US" dirty="0"/>
           </a:p>
@@ -6952,7 +6952,7 @@
                 <a:ea typeface="Archivo" pitchFamily="34" charset="-122"/>
                 <a:cs typeface="Archivo" pitchFamily="34" charset="-120"/>
               </a:rPr>
-              <a:t>Accent colours on light backgrounds: Ion #3350D6 for links and highlights, Ember #B34F0C for warnings.</a:t>
+              <a:t>Accent colors on light backgrounds: Ion #3350D6 for links and highlights, Ember #B34F0C for warnings.</a:t>
             </a:r>
             <a:endParaRPr lang="en-US" sz="2000" dirty="0"/>
           </a:p>
